--- a/slides/meeting4_deck.pptx
+++ b/slides/meeting4_deck.pptx
@@ -812,19 +812,19 @@
           <a:lstStyle/>
           <a:p>
             <a:r>
-              <a:t>Why CRPS is the verdict column and not NLL: NLL has a (x-mu)^2/2sigma^2 term that is unbounded as sigma -&gt; 0. The EnKF's ensemble collapses to sigma = 0.0025 while actually being wrong by 0.215, so its NLL is 1.7e18 — that cannot rank anything. CRPS is bounded, in data units, and reduces to MAE as sigma -&gt; 0.</a:t>
+              <a:t>Why CRPS is the verdict column and not NLL: NLL has a (x-mu)^2/2sigma^2 term that is unbounded as sigma -&gt; 0. The EnKF's ensemble collapses to sigma = 0.0025 while actually being wrong by 0.215, so its NLL is 1.7e18 (all-cells convention, matching the 0.215) — that cannot rank anything. CRPS is bounded, in data units, and reduces to MAE as sigma -&gt; 0.</a:t>
             </a:r>
           </a:p>
           <a:p/>
           <a:p>
             <a:r>
-              <a:t>Robustness, the important part: under the all-cells convention the same four come out -76.1% / -24.3% / +50.1% / +26.8%. The magnitudes move a lot — vsb0 looks catastrophic there and merely tied here — but the SIGN does not. Structural wins, bolt-on loses, both ways.</a:t>
+              <a:t>Robustness, the important part: under the all-cells convention the same four come out, in table order, -24.3% / -76.1% / +50.1% / +26.8%. The magnitudes move a lot — vsb0 looks catastrophic there and merely tied here — but the SIGN does not. Structural wins, bolt-on loses, both ways.</a:t>
             </a:r>
           </a:p>
           <a:p/>
           <a:p>
             <a:r>
-              <a:t>Cost, if asked: the sigma-hat is not free. aug0 is 13.9% worse than plain MSE on accuracy, vsb0 10.3% worse; the three arms' 5-seed intervals do not overlap. So vsb0 pays and buys nothing, aug0 pays 3.6 points more and buys a usable sigma.</a:t>
+              <a:t>Cost, if asked: the sigma-hat is not free. aug0 is 13.9% worse than plain MSE on accuracy, vsb0 10.2% worse; the three arms' 5-seed intervals do not overlap. So vsb0 pays and buys nothing, aug0 pays 3.7 points more and buys a usable sigma.</a:t>
             </a:r>
           </a:p>
         </p:txBody>

--- a/slides/meeting4_deck.pptx
+++ b/slides/meeting4_deck.pptx
@@ -900,13 +900,13 @@
           <a:p/>
           <a:p>
             <a:r>
-              <a:t>Interleaved, not blocked: round 1 runs every method, then round 2, and so on. Blocking would let a change in the shared node's background load land entirely on one method and be read as a difference between methods. Largest run-to-run spread here is 3.5% of the mean.</a:t>
+              <a:t>Interleaved, not blocked: round 1 runs every method, then round 2, and so on. Blocking would let a change in the shared node's background load land entirely on one method and be read as a difference between methods. Largest run-to-run spread here is 1.7% of the mean.</a:t>
             </a:r>
           </a:p>
           <a:p/>
           <a:p>
             <a:r>
-              <a:t>The caveat matters and I would rather state it than be asked: for the three per-frame methods this number IS the delay before that frame's estimate exists. For 4DVarNet it is not — one window solves in about 0.55 s. I have the latency figures measured and can show them if you want, but the amortised cost is what is on this slide.</a:t>
+              <a:t>The caveat matters and I would rather state it than be asked: for the three per-frame methods this number IS the delay before that frame's estimate exists. For 4DVarNet it is not — one window (200 frames) solves in about 0.65 s. I have the latency figures measured and can show them if you want, but the amortised cost is what is on this slide.</a:t>
             </a:r>
           </a:p>
           <a:p/>

--- a/slides/meeting4_deck.pptx
+++ b/slides/meeting4_deck.pptx
@@ -818,7 +818,7 @@
           <a:p/>
           <a:p>
             <a:r>
-              <a:t>Robustness, the important part: under the all-cells convention the same four come out, in table order, -24.3% / -76.1% / +50.1% / +26.8%. The magnitudes move a lot — vsb0 looks catastrophic there and merely tied here — but the SIGN does not. Structural wins, bolt-on loses, both ways.</a:t>
+              <a:t>Robustness, the important part: under the all-cells convention the same four come out, in table order, -24.3% / -76.1% / +50.1% / +26.8%. The magnitudes move a lot — vsb0 looks far from the null model there and level with it here — but the SIGN does not: the two structural designs sit below the null model under both conventions, the two added afterwards sit above it under both.</a:t>
             </a:r>
           </a:p>
           <a:p/>
@@ -982,7 +982,7 @@
           <a:lstStyle/>
           <a:p>
             <a:r>
-              <a:t>This is the strongest slide. Everything before it argues the hypothesis across methods; this proves it INSIDE one method, where architecture, data, and checkpoint rule are all held fixed.</a:t>
+              <a:t>Everything before this argues the hypothesis across methods; this proves it INSIDE one method, where architecture, data, and checkpoint rule are all held fixed.</a:t>
             </a:r>
           </a:p>
           <a:p/>
